--- a/docs/교재/통합반/10일차/통합반_10일차.pptx
+++ b/docs/교재/통합반/10일차/통합반_10일차.pptx
@@ -7693,7 +7693,7 @@
       </p:sp>
       <p:pic>
         <p:nvPicPr>
-          <p:cNvPr id="6" name="삽화:재고.svg" descr="illust_2161179044726129942_1791743711.png"/>
+          <p:cNvPr id="6" name="삽화:재고.svg" descr="illust_806265646709581601_1791743711.png"/>
           <p:cNvPicPr>
             <a:picLocks noChangeAspect="1"/>
           </p:cNvPicPr>
@@ -10501,7 +10501,7 @@
       </p:sp>
       <p:pic>
         <p:nvPicPr>
-          <p:cNvPr id="6" name="삽화:세흐름_나란히.svg" descr="illust_570595177160656949_1791743711.png"/>
+          <p:cNvPr id="6" name="삽화:세흐름_나란히.svg" descr="illust_4661136938804425910_1791743711.png"/>
           <p:cNvPicPr>
             <a:picLocks noChangeAspect="1"/>
           </p:cNvPicPr>
@@ -11987,7 +11987,7 @@
       </p:sp>
       <p:pic>
         <p:nvPicPr>
-          <p:cNvPr id="6" name="삽화:승인블록_자리.svg" descr="illust_829682910472121070_1791743711.png"/>
+          <p:cNvPr id="6" name="삽화:승인블록_자리.svg" descr="illust_4040680530659008127_1791743711.png"/>
           <p:cNvPicPr>
             <a:picLocks noChangeAspect="1"/>
           </p:cNvPicPr>
@@ -12918,7 +12918,7 @@
       </p:sp>
       <p:pic>
         <p:nvPicPr>
-          <p:cNvPr id="6" name="삽화:흐름_정기점검.svg" descr="illust_3963110479132725998_1791743711.png"/>
+          <p:cNvPr id="6" name="삽화:흐름_정기점검.svg" descr="illust_3373005224875698814_1791743711.png"/>
           <p:cNvPicPr>
             <a:picLocks noChangeAspect="1"/>
           </p:cNvPicPr>
@@ -13285,7 +13285,7 @@
         <p:spPr>
           <a:xfrm>
             <a:off x="4623065" y="4085904"/>
-            <a:ext cx="1309139" cy="755522"/>
+            <a:ext cx="1309139" cy="546353"/>
           </a:xfrm>
           <a:prstGeom prst="rect">
             <a:avLst/>
@@ -13313,7 +13313,7 @@
                 <a:ea typeface="맑은 고딕"/>
                 <a:cs typeface="맑은 고딕"/>
               </a:rPr>
-              <a:t>정비 오더 등록 · 공지 메일</a:t>
+              <a:t>정비 오더 · 공지 메일</a:t>
             </a:r>
           </a:p>
         </p:txBody>
@@ -13807,7 +13807,7 @@
       </p:sp>
       <p:pic>
         <p:nvPicPr>
-          <p:cNvPr id="6" name="삽화:흐름_재고보충.svg" descr="illust_450303175772138624_1791743711.png"/>
+          <p:cNvPr id="6" name="삽화:흐름_재고보충.svg" descr="illust_6016396477062377080_1791743711.png"/>
           <p:cNvPicPr>
             <a:picLocks noChangeAspect="1"/>
           </p:cNvPicPr>
@@ -22604,7 +22604,7 @@
       </p:sp>
       <p:pic>
         <p:nvPicPr>
-          <p:cNvPr id="6" name="삽화:병목.svg" descr="illust_1173094631142663338_1791743711.png"/>
+          <p:cNvPr id="6" name="삽화:병목.svg" descr="illust_3186638617570881710_1791743711.png"/>
           <p:cNvPicPr>
             <a:picLocks noChangeAspect="1"/>
           </p:cNvPicPr>
@@ -32155,7 +32155,7 @@
       </p:sp>
       <p:pic>
         <p:nvPicPr>
-          <p:cNvPr id="6" name="삽화:요소_복습.svg" descr="illust_4849814721774592552_1791743711.png"/>
+          <p:cNvPr id="6" name="삽화:요소_복습.svg" descr="illust_7836234085194457212_1791743711.png"/>
           <p:cNvPicPr>
             <a:picLocks noChangeAspect="1"/>
           </p:cNvPicPr>
@@ -32981,7 +32981,7 @@
       </p:sp>
       <p:pic>
         <p:nvPicPr>
-          <p:cNvPr id="6" name="삽화:다섯자리.svg" descr="illust_2956182244657324225_1791743711.png"/>
+          <p:cNvPr id="6" name="삽화:다섯자리.svg" descr="illust_720046115940027773_1791743711.png"/>
           <p:cNvPicPr>
             <a:picLocks noChangeAspect="1"/>
           </p:cNvPicPr>
@@ -33854,7 +33854,7 @@
       </p:sp>
       <p:pic>
         <p:nvPicPr>
-          <p:cNvPr id="6" name="삽화:주고받는것.svg" descr="illust_5372329702908282471_1791743711.png"/>
+          <p:cNvPr id="6" name="삽화:주고받는것.svg" descr="illust_5257674944807322298_1791743711.png"/>
           <p:cNvPicPr>
             <a:picLocks noChangeAspect="1"/>
           </p:cNvPicPr>
@@ -37758,7 +37758,7 @@
       </p:sp>
       <p:pic>
         <p:nvPicPr>
-          <p:cNvPr id="6" name="삽화:세종료.svg" descr="illust_2588908520892443864_1791743711.png"/>
+          <p:cNvPr id="6" name="삽화:세종료.svg" descr="illust_2418758361734001327_1791743711.png"/>
           <p:cNvPicPr>
             <a:picLocks noChangeAspect="1"/>
           </p:cNvPicPr>
@@ -39915,7 +39915,7 @@
       </p:sp>
       <p:pic>
         <p:nvPicPr>
-          <p:cNvPr id="6" name="삽화:세층연결.svg" descr="illust_4763847997221110137_1791743711.png"/>
+          <p:cNvPr id="6" name="삽화:세층연결.svg" descr="illust_8738276742378932320_1791743711.png"/>
           <p:cNvPicPr>
             <a:picLocks noChangeAspect="1"/>
           </p:cNvPicPr>
@@ -42416,7 +42416,7 @@
       </p:sp>
       <p:pic>
         <p:nvPicPr>
-          <p:cNvPr id="6" name="삽화:세시작.svg" descr="illust_5796995914287346720_1791743711.png"/>
+          <p:cNvPr id="6" name="삽화:세시작.svg" descr="illust_3679437654598954725_1791743711.png"/>
           <p:cNvPicPr>
             <a:picLocks noChangeAspect="1"/>
           </p:cNvPicPr>
@@ -54890,7 +54890,7 @@
       </p:sp>
       <p:pic>
         <p:nvPicPr>
-          <p:cNvPr id="6" name="삽화:운전시간.svg" descr="illust_7443360067980128902_1791743711.png"/>
+          <p:cNvPr id="6" name="삽화:운전시간.svg" descr="illust_211316157807788063_1791743711.png"/>
           <p:cNvPicPr>
             <a:picLocks noChangeAspect="1"/>
           </p:cNvPicPr>

--- a/docs/교재/통합반/10일차/통합반_10일차.pptx
+++ b/docs/교재/통합반/10일차/통합반_10일차.pptx
@@ -631,7 +631,7 @@
           <a:lstStyle/>
           <a:p>
             <a:r>
-              <a:t>달라지는 네 가지를 보았으니 이제 같은 것을 보겠습니다. 위에서부터 긴급 대응, 정기 점검, 재고 보충의 뼈대입니다. 세 줄 모두 경보로 시작해 에이전트가 제안하고, 사람이 승인하거나 거절하고, 시스템이 처리한 뒤 결과를 보고합니다. 하늘색 띠 안의 승인 작업과 갈림은 세 줄이 같은 자리, 같은 모양입니다. 달라지는 것은 띠의 오른쪽에 이어지는 시스템 작업의 수와 내용입니다.</a:t>
+              <a:t>달라지는 네 가지를 보았으니 이제 같은 것을 보겠습니다. 위에서부터 긴급 대응, 정기 점검, 재고 보충의 뼈대입니다. 세 줄 모두 경보로 시작해 에이전트가 제안하고, 사람이 승인하거나 거절하고, 시스템이 처리한 뒤 결과를 보고합니다. 하늘색 띠 안의 승인 작업과 갈림은 세 줄이 같은 자리, 같은 모양이어서 같은 승인 블록이라고 적었습니다. 달라지는 것은 띠의 오른쪽에 이어지는 시스템 작업의 수와 내용입니다.</a:t>
             </a:r>
           </a:p>
         </p:txBody>
@@ -7693,7 +7693,7 @@
       </p:sp>
       <p:pic>
         <p:nvPicPr>
-          <p:cNvPr id="6" name="삽화:재고.svg" descr="illust_806265646709581601_1791743711.png"/>
+          <p:cNvPr id="6" name="삽화:재고.svg" descr="illust_1990750196160848190_1791743711.png"/>
           <p:cNvPicPr>
             <a:picLocks noChangeAspect="1"/>
           </p:cNvPicPr>
@@ -10501,7 +10501,7 @@
       </p:sp>
       <p:pic>
         <p:nvPicPr>
-          <p:cNvPr id="6" name="삽화:세흐름_나란히.svg" descr="illust_4661136938804425910_1791743711.png"/>
+          <p:cNvPr id="6" name="삽화:세흐름_나란히.svg" descr="illust_3953512245984438881_1791743711.png"/>
           <p:cNvPicPr>
             <a:picLocks noChangeAspect="1"/>
           </p:cNvPicPr>
@@ -11987,7 +11987,7 @@
       </p:sp>
       <p:pic>
         <p:nvPicPr>
-          <p:cNvPr id="6" name="삽화:승인블록_자리.svg" descr="illust_4040680530659008127_1791743711.png"/>
+          <p:cNvPr id="6" name="삽화:승인블록_자리.svg" descr="illust_4286838747692366910_1791743711.png"/>
           <p:cNvPicPr>
             <a:picLocks noChangeAspect="1"/>
           </p:cNvPicPr>
@@ -12918,7 +12918,7 @@
       </p:sp>
       <p:pic>
         <p:nvPicPr>
-          <p:cNvPr id="6" name="삽화:흐름_정기점검.svg" descr="illust_3373005224875698814_1791743711.png"/>
+          <p:cNvPr id="6" name="삽화:흐름_정기점검.svg" descr="illust_233665495782639655_1791743711.png"/>
           <p:cNvPicPr>
             <a:picLocks noChangeAspect="1"/>
           </p:cNvPicPr>
@@ -13807,7 +13807,7 @@
       </p:sp>
       <p:pic>
         <p:nvPicPr>
-          <p:cNvPr id="6" name="삽화:흐름_재고보충.svg" descr="illust_6016396477062377080_1791743711.png"/>
+          <p:cNvPr id="6" name="삽화:흐름_재고보충.svg" descr="illust_4774271506014352849_1791743711.png"/>
           <p:cNvPicPr>
             <a:picLocks noChangeAspect="1"/>
           </p:cNvPicPr>
@@ -22604,7 +22604,7 @@
       </p:sp>
       <p:pic>
         <p:nvPicPr>
-          <p:cNvPr id="6" name="삽화:병목.svg" descr="illust_3186638617570881710_1791743711.png"/>
+          <p:cNvPr id="6" name="삽화:병목.svg" descr="illust_1596372814716610229_1791743711.png"/>
           <p:cNvPicPr>
             <a:picLocks noChangeAspect="1"/>
           </p:cNvPicPr>
@@ -32155,7 +32155,7 @@
       </p:sp>
       <p:pic>
         <p:nvPicPr>
-          <p:cNvPr id="6" name="삽화:요소_복습.svg" descr="illust_7836234085194457212_1791743711.png"/>
+          <p:cNvPr id="6" name="삽화:요소_복습.svg" descr="illust_6308920299718935038_1791743711.png"/>
           <p:cNvPicPr>
             <a:picLocks noChangeAspect="1"/>
           </p:cNvPicPr>
@@ -32981,7 +32981,7 @@
       </p:sp>
       <p:pic>
         <p:nvPicPr>
-          <p:cNvPr id="6" name="삽화:다섯자리.svg" descr="illust_720046115940027773_1791743711.png"/>
+          <p:cNvPr id="6" name="삽화:다섯자리.svg" descr="illust_598232416972624231_1791743711.png"/>
           <p:cNvPicPr>
             <a:picLocks noChangeAspect="1"/>
           </p:cNvPicPr>
@@ -33854,7 +33854,7 @@
       </p:sp>
       <p:pic>
         <p:nvPicPr>
-          <p:cNvPr id="6" name="삽화:주고받는것.svg" descr="illust_5257674944807322298_1791743711.png"/>
+          <p:cNvPr id="6" name="삽화:주고받는것.svg" descr="illust_2371925773865746610_1791743711.png"/>
           <p:cNvPicPr>
             <a:picLocks noChangeAspect="1"/>
           </p:cNvPicPr>
@@ -37758,7 +37758,7 @@
       </p:sp>
       <p:pic>
         <p:nvPicPr>
-          <p:cNvPr id="6" name="삽화:세종료.svg" descr="illust_2418758361734001327_1791743711.png"/>
+          <p:cNvPr id="6" name="삽화:세종료.svg" descr="illust_942665857729190661_1791743711.png"/>
           <p:cNvPicPr>
             <a:picLocks noChangeAspect="1"/>
           </p:cNvPicPr>
@@ -39915,7 +39915,7 @@
       </p:sp>
       <p:pic>
         <p:nvPicPr>
-          <p:cNvPr id="6" name="삽화:세층연결.svg" descr="illust_8738276742378932320_1791743711.png"/>
+          <p:cNvPr id="6" name="삽화:세층연결.svg" descr="illust_5462493619061007820_1791743711.png"/>
           <p:cNvPicPr>
             <a:picLocks noChangeAspect="1"/>
           </p:cNvPicPr>
@@ -41623,7 +41623,7 @@
                 <a:ea typeface="맑은 고딕"/>
                 <a:cs typeface="맑은 고딕"/>
               </a:rPr>
-              <a:t>쿨러 핀 오염으로 가려</a:t>
+              <a:t>쿨러 핀 오염으로</a:t>
             </a:r>
           </a:p>
           <a:p>
@@ -41644,7 +41644,7 @@
                 <a:ea typeface="맑은 고딕"/>
                 <a:cs typeface="맑은 고딕"/>
               </a:rPr>
-              <a:t>이 조치를 추천한다</a:t>
+              <a:t>가려 추천한다</a:t>
             </a:r>
           </a:p>
         </p:txBody>
@@ -42017,7 +42017,7 @@
                 <a:ea typeface="맑은 고딕"/>
                 <a:cs typeface="맑은 고딕"/>
               </a:rPr>
-              <a:t>팬 속도 100 % 명령</a:t>
+              <a:t>프로세스가</a:t>
             </a:r>
           </a:p>
           <a:p>
@@ -42038,7 +42038,28 @@
                 <a:ea typeface="맑은 고딕"/>
                 <a:cs typeface="맑은 고딕"/>
               </a:rPr>
-              <a:t>CMD-1010-0001-01d1</a:t>
+              <a:t>팬 속도 100 %</a:t>
+            </a:r>
+          </a:p>
+          <a:p>
+            <a:pPr algn="ctr">
+              <a:lnSpc>
+                <a:spcPct val="110000"/>
+              </a:lnSpc>
+              <a:spcAft>
+                <a:spcPts val="400"/>
+              </a:spcAft>
+            </a:pPr>
+            <a:r>
+              <a:rPr sz="1250" b="0">
+                <a:solidFill>
+                  <a:srgbClr val="1F2A3A"/>
+                </a:solidFill>
+                <a:latin typeface="맑은 고딕"/>
+                <a:ea typeface="맑은 고딕"/>
+                <a:cs typeface="맑은 고딕"/>
+              </a:rPr>
+              <a:t>명령을 낸다</a:t>
             </a:r>
           </a:p>
         </p:txBody>
@@ -42416,7 +42437,7 @@
       </p:sp>
       <p:pic>
         <p:nvPicPr>
-          <p:cNvPr id="6" name="삽화:세시작.svg" descr="illust_3679437654598954725_1791743711.png"/>
+          <p:cNvPr id="6" name="삽화:세시작.svg" descr="illust_5573144695316386182_1791743711.png"/>
           <p:cNvPicPr>
             <a:picLocks noChangeAspect="1"/>
           </p:cNvPicPr>
@@ -51304,7 +51325,7 @@
                 <a:ea typeface="맑은 고딕"/>
                 <a:cs typeface="맑은 고딕"/>
               </a:rPr>
-              <a:t>설비를 세우는 정비 오더는 효과를 내는 작업이므로 설비보전팀장의 승인 뒤에 둔다</a:t>
+              <a:t>정비 오더는 효과를 내는 작업이므로 설비보전팀장의 승인 뒤에 둔다</a:t>
             </a:r>
           </a:p>
         </p:txBody>
@@ -54890,7 +54911,7 @@
       </p:sp>
       <p:pic>
         <p:nvPicPr>
-          <p:cNvPr id="6" name="삽화:운전시간.svg" descr="illust_211316157807788063_1791743711.png"/>
+          <p:cNvPr id="6" name="삽화:운전시간.svg" descr="illust_4413857956564199333_1791743711.png"/>
           <p:cNvPicPr>
             <a:picLocks noChangeAspect="1"/>
           </p:cNvPicPr>

--- a/docs/교재/통합반/10일차/통합반_10일차.pptx
+++ b/docs/교재/통합반/10일차/통합반_10일차.pptx
@@ -1472,7 +1472,7 @@
           <a:lstStyle/>
           <a:p>
             <a:r>
-              <a:t>프로세스를 실행하면 기록이 쌓입니다. 승인된 긴급 대응 처리 건의 단계별 시각입니다. 에이전트의 단계는 15시 22분 46초에 시작해 24분 8초에 끝났고, 곧바로 운전원 승인 단계가 열렸습니다. 이런 기록으로 업무가 어디까지 진행되었고 어디서 기다리고 있는지를 지켜보는 일을 모니터링이라고 합니다. 끝 시각에서 시작 시각을 빼면 그 단계에 걸린 시간이 나옵니다.</a:t>
+              <a:t>프로세스를 실행하면 기록이 쌓입니다. 승인되어 끝난 긴급 대응 처리 건의 단계 기록입니다. 에이전트의 단계부터 결과 보고까지 여섯 단계에 상태와 담당이 적혀 있고, 단계마다 그 단계가 열린 시각과 끝난 시각이 함께 남습니다. 이런 기록으로 업무가 어디까지 진행되었고 어디서 기다리고 있는지를 지켜보는 일을 모니터링이라고 합니다. 끝난 시각에서 열린 시각을 빼면 그 단계에 걸린 시간이 나옵니다.</a:t>
             </a:r>
           </a:p>
         </p:txBody>
@@ -1542,7 +1542,7 @@
           <a:lstStyle/>
           <a:p>
             <a:r>
-              <a:t>단계별 시각을 막대로 그리면 어디서 시간이 걸렸는지가 보입니다. 승인된 세 처리 건의 실제 기록입니다. 흐름 전체를 늦추는 단계를 병목, Bottleneck이라고 합니다. 긴급 대응 146초 가운데 에이전트의 판단이 82.3초, 유온의 회복을 기다리는 재관측이 60.2초였고, 정기 점검과 재고 보충에서도 에이전트의 단계가 가장 길었습니다. 세 건에서는 승인이 곧바로 이루어져 승인 단계가 짧았지만, 승인자의 응답이 늦어지면 이 단계가 병목이 됩니다.</a:t>
+              <a:t>단계마다 걸린 시간을 구해 견주면 어디서 시간이 걸렸는지가 보이며, 그 가운데 가장 오래 걸려 흐름 전체를 늦추는 단계를 병목, Bottleneck이라고 합니다. 세 프로세스의 단계를 순서대로 놓았습니다. 하늘색은 에이전트의 단계, 흰 띠는 승인 단계, 연한 색은 시스템 단계입니다. 에이전트와 시스템의 단계는 맡은 일을 마치면 끝나지만, 점선으로 두른 승인 단계는 승인자가 응답할 때까지 열려 있습니다. 그래서 응답이 늦어지면 세 프로세스 어디서나 이 단계가 병목이 됩니다.</a:t>
             </a:r>
           </a:p>
         </p:txBody>
@@ -3292,7 +3292,7 @@
           <a:lstStyle/>
           <a:p>
             <a:r>
-              <a:t>프로세스는 한 번 설계하고 끝나는 것이 아닙니다. 세 업무의 처리 건은 단계마다 시각을 남겼고, 그 기록에서 에이전트의 단계가 가장 길었다는 것과 승인자의 응답이 늦어지면 승인 단계가 병목이 된다는 것을 읽었습니다. 여러 건을 모은 지표에서 승인 대기가 길거나 거절이 많은 자리가 보이면 정의를 고치고, 새 판본으로 배포해 다음 경보부터 적용합니다. 지난 시간에 본 BPM의 분석, 설계, 실행, 모니터링, 개선이 이렇게 한 바퀴를 돕니다.</a:t>
+              <a:t>프로세스는 한 번 설계하고 끝나는 것이 아닙니다. 세 업무의 처리 건은 단계마다 시작과 끝의 시각을 남기고, 그 기록에서 승인자의 응답이 늦어진 승인 단계 같은 병목을 찾습니다. 여러 건을 모은 지표에서 승인 대기가 길거나 거절이 많은 자리가 보이면 정의를 고치고, 새 판본으로 배포해 다음 경보부터 적용합니다. 지난 시간에 본 BPM의 분석, 설계, 실행, 모니터링, 개선이 이렇게 한 바퀴를 돕니다.</a:t>
             </a:r>
           </a:p>
         </p:txBody>
@@ -7764,7 +7764,7 @@
       </p:sp>
       <p:pic>
         <p:nvPicPr>
-          <p:cNvPr id="6" name="삽화:재고.svg" descr="illust_360525881362029154_1791743711.png"/>
+          <p:cNvPr id="6" name="삽화:재고.svg" descr="illust_6491785954511839089_1791772944.png"/>
           <p:cNvPicPr>
             <a:picLocks noChangeAspect="1"/>
           </p:cNvPicPr>
@@ -10572,7 +10572,7 @@
       </p:sp>
       <p:pic>
         <p:nvPicPr>
-          <p:cNvPr id="6" name="삽화:세흐름_나란히.svg" descr="illust_3513400080317192286_1791743711.png"/>
+          <p:cNvPr id="6" name="삽화:세흐름_나란히.svg" descr="illust_6481463111208013829_1791772944.png"/>
           <p:cNvPicPr>
             <a:picLocks noChangeAspect="1"/>
           </p:cNvPicPr>
@@ -12058,7 +12058,7 @@
       </p:sp>
       <p:pic>
         <p:nvPicPr>
-          <p:cNvPr id="6" name="삽화:승인블록_자리.svg" descr="illust_2075889086458309977_1791743711.png"/>
+          <p:cNvPr id="6" name="삽화:승인블록_자리.svg" descr="illust_8993793145455126790_1791772944.png"/>
           <p:cNvPicPr>
             <a:picLocks noChangeAspect="1"/>
           </p:cNvPicPr>
@@ -12989,7 +12989,7 @@
       </p:sp>
       <p:pic>
         <p:nvPicPr>
-          <p:cNvPr id="6" name="삽화:흐름_정기점검.svg" descr="illust_1940855344469196025_1791743711.png"/>
+          <p:cNvPr id="6" name="삽화:흐름_정기점검.svg" descr="illust_7802059031914229748_1791772944.png"/>
           <p:cNvPicPr>
             <a:picLocks noChangeAspect="1"/>
           </p:cNvPicPr>
@@ -13878,7 +13878,7 @@
       </p:sp>
       <p:pic>
         <p:nvPicPr>
-          <p:cNvPr id="6" name="삽화:흐름_재고보충.svg" descr="illust_9037847768925804151_1791743711.png"/>
+          <p:cNvPr id="6" name="삽화:흐름_재고보충.svg" descr="illust_6434205169900711284_1791772944.png"/>
           <p:cNvPicPr>
             <a:picLocks noChangeAspect="1"/>
           </p:cNvPicPr>
@@ -22088,22 +22088,33 @@
                 <a:solidFill>
                   <a:srgbClr val="E8EEF6"/>
                 </a:solidFill>
-                <a:latin typeface="맑은 고딕"/>
-                <a:ea typeface="맑은 고딕"/>
-                <a:cs typeface="맑은 고딕"/>
-              </a:rPr>
-              <a:t>단계</a:t>
+                <a:latin typeface="Consolas"/>
+                <a:ea typeface="맑은 고딕"/>
+                <a:cs typeface="맑은 고딕"/>
+              </a:rPr>
+              <a:t># </a:t>
             </a:r>
             <a:r>
               <a:rPr sz="1300" b="0">
                 <a:solidFill>
                   <a:srgbClr val="E8EEF6"/>
                 </a:solidFill>
+                <a:latin typeface="맑은 고딕"/>
+                <a:ea typeface="맑은 고딕"/>
+                <a:cs typeface="맑은 고딕"/>
+              </a:rPr>
+              <a:t>처리</a:t>
+            </a:r>
+            <a:r>
+              <a:rPr sz="1300" b="0">
+                <a:solidFill>
+                  <a:srgbClr val="E8EEF6"/>
+                </a:solidFill>
                 <a:latin typeface="Consolas"/>
                 <a:ea typeface="맑은 고딕"/>
                 <a:cs typeface="맑은 고딕"/>
               </a:rPr>
-              <a:t>          </a:t>
+              <a:t> </a:t>
             </a:r>
             <a:r>
               <a:rPr sz="1300" b="0">
@@ -22114,7 +22125,7 @@
                 <a:ea typeface="맑은 고딕"/>
                 <a:cs typeface="맑은 고딕"/>
               </a:rPr>
-              <a:t>시작</a:t>
+              <a:t>건</a:t>
             </a:r>
             <a:r>
               <a:rPr sz="1300" b="0">
@@ -22125,7 +22136,7 @@
                 <a:ea typeface="맑은 고딕"/>
                 <a:cs typeface="맑은 고딕"/>
               </a:rPr>
-              <a:t>        </a:t>
+              <a:t> c3_cooling.32aca7de-</a:t>
             </a:r>
             <a:r>
               <a:rPr sz="1300" b="0">
@@ -22136,7 +22147,18 @@
                 <a:ea typeface="맑은 고딕"/>
                 <a:cs typeface="맑은 고딕"/>
               </a:rPr>
-              <a:t>끝</a:t>
+              <a:t>…</a:t>
+            </a:r>
+            <a:r>
+              <a:rPr sz="1300" b="0">
+                <a:solidFill>
+                  <a:srgbClr val="E8EEF6"/>
+                </a:solidFill>
+                <a:latin typeface="Consolas"/>
+                <a:ea typeface="맑은 고딕"/>
+                <a:cs typeface="맑은 고딕"/>
+              </a:rPr>
+              <a:t>  COMPLETED</a:t>
             </a:r>
           </a:p>
           <a:p>
@@ -22157,7 +22179,106 @@
                 <a:ea typeface="맑은 고딕"/>
                 <a:cs typeface="맑은 고딕"/>
               </a:rPr>
-              <a:t>T_agent     15:22:46    15:24:08</a:t>
+              <a:t># </a:t>
+            </a:r>
+            <a:r>
+              <a:rPr sz="1300" b="0">
+                <a:solidFill>
+                  <a:srgbClr val="E8EEF6"/>
+                </a:solidFill>
+                <a:latin typeface="맑은 고딕"/>
+                <a:ea typeface="맑은 고딕"/>
+                <a:cs typeface="맑은 고딕"/>
+              </a:rPr>
+              <a:t>단계</a:t>
+            </a:r>
+            <a:r>
+              <a:rPr sz="1300" b="0">
+                <a:solidFill>
+                  <a:srgbClr val="E8EEF6"/>
+                </a:solidFill>
+                <a:latin typeface="Consolas"/>
+                <a:ea typeface="맑은 고딕"/>
+                <a:cs typeface="맑은 고딕"/>
+              </a:rPr>
+              <a:t> </a:t>
+            </a:r>
+            <a:r>
+              <a:rPr sz="1300" b="0">
+                <a:solidFill>
+                  <a:srgbClr val="E8EEF6"/>
+                </a:solidFill>
+                <a:latin typeface="맑은 고딕"/>
+                <a:ea typeface="맑은 고딕"/>
+                <a:cs typeface="맑은 고딕"/>
+              </a:rPr>
+              <a:t>·</a:t>
+            </a:r>
+            <a:r>
+              <a:rPr sz="1300" b="0">
+                <a:solidFill>
+                  <a:srgbClr val="E8EEF6"/>
+                </a:solidFill>
+                <a:latin typeface="Consolas"/>
+                <a:ea typeface="맑은 고딕"/>
+                <a:cs typeface="맑은 고딕"/>
+              </a:rPr>
+              <a:t> </a:t>
+            </a:r>
+            <a:r>
+              <a:rPr sz="1300" b="0">
+                <a:solidFill>
+                  <a:srgbClr val="E8EEF6"/>
+                </a:solidFill>
+                <a:latin typeface="맑은 고딕"/>
+                <a:ea typeface="맑은 고딕"/>
+                <a:cs typeface="맑은 고딕"/>
+              </a:rPr>
+              <a:t>상태</a:t>
+            </a:r>
+            <a:r>
+              <a:rPr sz="1300" b="0">
+                <a:solidFill>
+                  <a:srgbClr val="E8EEF6"/>
+                </a:solidFill>
+                <a:latin typeface="Consolas"/>
+                <a:ea typeface="맑은 고딕"/>
+                <a:cs typeface="맑은 고딕"/>
+              </a:rPr>
+              <a:t> </a:t>
+            </a:r>
+            <a:r>
+              <a:rPr sz="1300" b="0">
+                <a:solidFill>
+                  <a:srgbClr val="E8EEF6"/>
+                </a:solidFill>
+                <a:latin typeface="맑은 고딕"/>
+                <a:ea typeface="맑은 고딕"/>
+                <a:cs typeface="맑은 고딕"/>
+              </a:rPr>
+              <a:t>·</a:t>
+            </a:r>
+            <a:r>
+              <a:rPr sz="1300" b="0">
+                <a:solidFill>
+                  <a:srgbClr val="E8EEF6"/>
+                </a:solidFill>
+                <a:latin typeface="Consolas"/>
+                <a:ea typeface="맑은 고딕"/>
+                <a:cs typeface="맑은 고딕"/>
+              </a:rPr>
+              <a:t> </a:t>
+            </a:r>
+            <a:r>
+              <a:rPr sz="1300" b="0">
+                <a:solidFill>
+                  <a:srgbClr val="E8EEF6"/>
+                </a:solidFill>
+                <a:latin typeface="맑은 고딕"/>
+                <a:ea typeface="맑은 고딕"/>
+                <a:cs typeface="맑은 고딕"/>
+              </a:rPr>
+              <a:t>담당</a:t>
             </a:r>
           </a:p>
           <a:p>
@@ -22178,7 +22299,18 @@
                 <a:ea typeface="맑은 고딕"/>
                 <a:cs typeface="맑은 고딕"/>
               </a:rPr>
-              <a:t>T_approve   15:24:08    15:24:09</a:t>
+              <a:t>T_agent     DONE   </a:t>
+            </a:r>
+            <a:r>
+              <a:rPr sz="1300" b="0">
+                <a:solidFill>
+                  <a:srgbClr val="E8EEF6"/>
+                </a:solidFill>
+                <a:latin typeface="맑은 고딕"/>
+                <a:ea typeface="맑은 고딕"/>
+                <a:cs typeface="맑은 고딕"/>
+              </a:rPr>
+              <a:t>에이전트</a:t>
             </a:r>
           </a:p>
           <a:p>
@@ -22199,7 +22331,18 @@
                 <a:ea typeface="맑은 고딕"/>
                 <a:cs typeface="맑은 고딕"/>
               </a:rPr>
-              <a:t>T_cmd       15:24:09    15:24:10</a:t>
+              <a:t>T_approve   DONE   </a:t>
+            </a:r>
+            <a:r>
+              <a:rPr sz="1300" b="0">
+                <a:solidFill>
+                  <a:srgbClr val="E8EEF6"/>
+                </a:solidFill>
+                <a:latin typeface="맑은 고딕"/>
+                <a:ea typeface="맑은 고딕"/>
+                <a:cs typeface="맑은 고딕"/>
+              </a:rPr>
+              <a:t>운전원</a:t>
             </a:r>
           </a:p>
           <a:p>
@@ -22220,7 +22363,18 @@
                 <a:ea typeface="맑은 고딕"/>
                 <a:cs typeface="맑은 고딕"/>
               </a:rPr>
-              <a:t>T_reobs     15:24:10    15:25:11</a:t>
+              <a:t>T_cmd       DONE   </a:t>
+            </a:r>
+            <a:r>
+              <a:rPr sz="1300" b="0">
+                <a:solidFill>
+                  <a:srgbClr val="E8EEF6"/>
+                </a:solidFill>
+                <a:latin typeface="맑은 고딕"/>
+                <a:ea typeface="맑은 고딕"/>
+                <a:cs typeface="맑은 고딕"/>
+              </a:rPr>
+              <a:t>시스템</a:t>
             </a:r>
           </a:p>
           <a:p>
@@ -22241,7 +22395,18 @@
                 <a:ea typeface="맑은 고딕"/>
                 <a:cs typeface="맑은 고딕"/>
               </a:rPr>
-              <a:t>T_wo        15:25:11    15:25:12</a:t>
+              <a:t>T_reobs     DONE   </a:t>
+            </a:r>
+            <a:r>
+              <a:rPr sz="1300" b="0">
+                <a:solidFill>
+                  <a:srgbClr val="E8EEF6"/>
+                </a:solidFill>
+                <a:latin typeface="맑은 고딕"/>
+                <a:ea typeface="맑은 고딕"/>
+                <a:cs typeface="맑은 고딕"/>
+              </a:rPr>
+              <a:t>시스템</a:t>
             </a:r>
           </a:p>
           <a:p>
@@ -22262,7 +22427,310 @@
                 <a:ea typeface="맑은 고딕"/>
                 <a:cs typeface="맑은 고딕"/>
               </a:rPr>
-              <a:t>R_ok        15:25:12    15:25:12</a:t>
+              <a:t>T_wo        DONE   </a:t>
+            </a:r>
+            <a:r>
+              <a:rPr sz="1300" b="0">
+                <a:solidFill>
+                  <a:srgbClr val="E8EEF6"/>
+                </a:solidFill>
+                <a:latin typeface="맑은 고딕"/>
+                <a:ea typeface="맑은 고딕"/>
+                <a:cs typeface="맑은 고딕"/>
+              </a:rPr>
+              <a:t>시스템</a:t>
+            </a:r>
+          </a:p>
+          <a:p>
+            <a:pPr algn="l">
+              <a:lnSpc>
+                <a:spcPct val="110000"/>
+              </a:lnSpc>
+              <a:spcAft>
+                <a:spcPts val="200"/>
+              </a:spcAft>
+            </a:pPr>
+            <a:r>
+              <a:rPr sz="1300" b="0">
+                <a:solidFill>
+                  <a:srgbClr val="E8EEF6"/>
+                </a:solidFill>
+                <a:latin typeface="Consolas"/>
+                <a:ea typeface="맑은 고딕"/>
+                <a:cs typeface="맑은 고딕"/>
+              </a:rPr>
+              <a:t>R_ok        DONE   </a:t>
+            </a:r>
+            <a:r>
+              <a:rPr sz="1300" b="0">
+                <a:solidFill>
+                  <a:srgbClr val="E8EEF6"/>
+                </a:solidFill>
+                <a:latin typeface="맑은 고딕"/>
+                <a:ea typeface="맑은 고딕"/>
+                <a:cs typeface="맑은 고딕"/>
+              </a:rPr>
+              <a:t>시스템</a:t>
+            </a:r>
+          </a:p>
+          <a:p>
+            <a:pPr algn="l">
+              <a:lnSpc>
+                <a:spcPct val="110000"/>
+              </a:lnSpc>
+              <a:spcAft>
+                <a:spcPts val="200"/>
+              </a:spcAft>
+            </a:pPr>
+          </a:p>
+          <a:p>
+            <a:pPr algn="l">
+              <a:lnSpc>
+                <a:spcPct val="110000"/>
+              </a:lnSpc>
+              <a:spcAft>
+                <a:spcPts val="200"/>
+              </a:spcAft>
+            </a:pPr>
+            <a:r>
+              <a:rPr sz="1300" b="0">
+                <a:solidFill>
+                  <a:srgbClr val="E8EEF6"/>
+                </a:solidFill>
+                <a:latin typeface="Consolas"/>
+                <a:ea typeface="맑은 고딕"/>
+                <a:cs typeface="맑은 고딕"/>
+              </a:rPr>
+              <a:t># </a:t>
+            </a:r>
+            <a:r>
+              <a:rPr sz="1300" b="0">
+                <a:solidFill>
+                  <a:srgbClr val="E8EEF6"/>
+                </a:solidFill>
+                <a:latin typeface="맑은 고딕"/>
+                <a:ea typeface="맑은 고딕"/>
+                <a:cs typeface="맑은 고딕"/>
+              </a:rPr>
+              <a:t>단계마다</a:t>
+            </a:r>
+            <a:r>
+              <a:rPr sz="1300" b="0">
+                <a:solidFill>
+                  <a:srgbClr val="E8EEF6"/>
+                </a:solidFill>
+                <a:latin typeface="Consolas"/>
+                <a:ea typeface="맑은 고딕"/>
+                <a:cs typeface="맑은 고딕"/>
+              </a:rPr>
+              <a:t> </a:t>
+            </a:r>
+            <a:r>
+              <a:rPr sz="1300" b="0">
+                <a:solidFill>
+                  <a:srgbClr val="E8EEF6"/>
+                </a:solidFill>
+                <a:latin typeface="맑은 고딕"/>
+                <a:ea typeface="맑은 고딕"/>
+                <a:cs typeface="맑은 고딕"/>
+              </a:rPr>
+              <a:t>함께</a:t>
+            </a:r>
+            <a:r>
+              <a:rPr sz="1300" b="0">
+                <a:solidFill>
+                  <a:srgbClr val="E8EEF6"/>
+                </a:solidFill>
+                <a:latin typeface="Consolas"/>
+                <a:ea typeface="맑은 고딕"/>
+                <a:cs typeface="맑은 고딕"/>
+              </a:rPr>
+              <a:t> </a:t>
+            </a:r>
+            <a:r>
+              <a:rPr sz="1300" b="0">
+                <a:solidFill>
+                  <a:srgbClr val="E8EEF6"/>
+                </a:solidFill>
+                <a:latin typeface="맑은 고딕"/>
+                <a:ea typeface="맑은 고딕"/>
+                <a:cs typeface="맑은 고딕"/>
+              </a:rPr>
+              <a:t>남는</a:t>
+            </a:r>
+            <a:r>
+              <a:rPr sz="1300" b="0">
+                <a:solidFill>
+                  <a:srgbClr val="E8EEF6"/>
+                </a:solidFill>
+                <a:latin typeface="Consolas"/>
+                <a:ea typeface="맑은 고딕"/>
+                <a:cs typeface="맑은 고딕"/>
+              </a:rPr>
+              <a:t> </a:t>
+            </a:r>
+            <a:r>
+              <a:rPr sz="1300" b="0">
+                <a:solidFill>
+                  <a:srgbClr val="E8EEF6"/>
+                </a:solidFill>
+                <a:latin typeface="맑은 고딕"/>
+                <a:ea typeface="맑은 고딕"/>
+                <a:cs typeface="맑은 고딕"/>
+              </a:rPr>
+              <a:t>것</a:t>
+            </a:r>
+          </a:p>
+          <a:p>
+            <a:pPr algn="l">
+              <a:lnSpc>
+                <a:spcPct val="110000"/>
+              </a:lnSpc>
+              <a:spcAft>
+                <a:spcPts val="200"/>
+              </a:spcAft>
+            </a:pPr>
+            <a:r>
+              <a:rPr sz="1300" b="0">
+                <a:solidFill>
+                  <a:srgbClr val="E8EEF6"/>
+                </a:solidFill>
+                <a:latin typeface="Consolas"/>
+                <a:ea typeface="맑은 고딕"/>
+                <a:cs typeface="맑은 고딕"/>
+              </a:rPr>
+              <a:t>start       </a:t>
+            </a:r>
+            <a:r>
+              <a:rPr sz="1300" b="0">
+                <a:solidFill>
+                  <a:srgbClr val="E8EEF6"/>
+                </a:solidFill>
+                <a:latin typeface="맑은 고딕"/>
+                <a:ea typeface="맑은 고딕"/>
+                <a:cs typeface="맑은 고딕"/>
+              </a:rPr>
+              <a:t>단계가</a:t>
+            </a:r>
+            <a:r>
+              <a:rPr sz="1300" b="0">
+                <a:solidFill>
+                  <a:srgbClr val="E8EEF6"/>
+                </a:solidFill>
+                <a:latin typeface="Consolas"/>
+                <a:ea typeface="맑은 고딕"/>
+                <a:cs typeface="맑은 고딕"/>
+              </a:rPr>
+              <a:t> </a:t>
+            </a:r>
+            <a:r>
+              <a:rPr sz="1300" b="0">
+                <a:solidFill>
+                  <a:srgbClr val="E8EEF6"/>
+                </a:solidFill>
+                <a:latin typeface="맑은 고딕"/>
+                <a:ea typeface="맑은 고딕"/>
+                <a:cs typeface="맑은 고딕"/>
+              </a:rPr>
+              <a:t>열린</a:t>
+            </a:r>
+            <a:r>
+              <a:rPr sz="1300" b="0">
+                <a:solidFill>
+                  <a:srgbClr val="E8EEF6"/>
+                </a:solidFill>
+                <a:latin typeface="Consolas"/>
+                <a:ea typeface="맑은 고딕"/>
+                <a:cs typeface="맑은 고딕"/>
+              </a:rPr>
+              <a:t> </a:t>
+            </a:r>
+            <a:r>
+              <a:rPr sz="1300" b="0">
+                <a:solidFill>
+                  <a:srgbClr val="E8EEF6"/>
+                </a:solidFill>
+                <a:latin typeface="맑은 고딕"/>
+                <a:ea typeface="맑은 고딕"/>
+                <a:cs typeface="맑은 고딕"/>
+              </a:rPr>
+              <a:t>시각</a:t>
+            </a:r>
+          </a:p>
+          <a:p>
+            <a:pPr algn="l">
+              <a:lnSpc>
+                <a:spcPct val="110000"/>
+              </a:lnSpc>
+              <a:spcAft>
+                <a:spcPts val="200"/>
+              </a:spcAft>
+            </a:pPr>
+            <a:r>
+              <a:rPr sz="1300" b="0">
+                <a:solidFill>
+                  <a:srgbClr val="E8EEF6"/>
+                </a:solidFill>
+                <a:latin typeface="Consolas"/>
+                <a:ea typeface="맑은 고딕"/>
+                <a:cs typeface="맑은 고딕"/>
+              </a:rPr>
+              <a:t>end         </a:t>
+            </a:r>
+            <a:r>
+              <a:rPr sz="1300" b="0">
+                <a:solidFill>
+                  <a:srgbClr val="E8EEF6"/>
+                </a:solidFill>
+                <a:latin typeface="맑은 고딕"/>
+                <a:ea typeface="맑은 고딕"/>
+                <a:cs typeface="맑은 고딕"/>
+              </a:rPr>
+              <a:t>단계가</a:t>
+            </a:r>
+            <a:r>
+              <a:rPr sz="1300" b="0">
+                <a:solidFill>
+                  <a:srgbClr val="E8EEF6"/>
+                </a:solidFill>
+                <a:latin typeface="Consolas"/>
+                <a:ea typeface="맑은 고딕"/>
+                <a:cs typeface="맑은 고딕"/>
+              </a:rPr>
+              <a:t> </a:t>
+            </a:r>
+            <a:r>
+              <a:rPr sz="1300" b="0">
+                <a:solidFill>
+                  <a:srgbClr val="E8EEF6"/>
+                </a:solidFill>
+                <a:latin typeface="맑은 고딕"/>
+                <a:ea typeface="맑은 고딕"/>
+                <a:cs typeface="맑은 고딕"/>
+              </a:rPr>
+              <a:t>끝난</a:t>
+            </a:r>
+            <a:r>
+              <a:rPr sz="1300" b="0">
+                <a:solidFill>
+                  <a:srgbClr val="E8EEF6"/>
+                </a:solidFill>
+                <a:latin typeface="Consolas"/>
+                <a:ea typeface="맑은 고딕"/>
+                <a:cs typeface="맑은 고딕"/>
+              </a:rPr>
+              <a:t> </a:t>
+            </a:r>
+            <a:r>
+              <a:rPr sz="1300" b="0">
+                <a:solidFill>
+                  <a:srgbClr val="E8EEF6"/>
+                </a:solidFill>
+                <a:latin typeface="맑은 고딕"/>
+                <a:ea typeface="맑은 고딕"/>
+                <a:cs typeface="맑은 고딕"/>
+              </a:rPr>
+              <a:t>시각</a:t>
             </a:r>
           </a:p>
         </p:txBody>
@@ -22472,7 +22940,7 @@
                 <a:ea typeface="맑은 고딕"/>
                 <a:cs typeface="맑은 고딕"/>
               </a:rPr>
-              <a:t>읽는 법</a:t>
+              <a:t>걸린 시간</a:t>
             </a:r>
           </a:p>
           <a:p>
@@ -22493,7 +22961,7 @@
                 <a:ea typeface="맑은 고딕"/>
                 <a:cs typeface="맑은 고딕"/>
               </a:rPr>
-              <a:t>끝에서 시작을 빼면</a:t>
+              <a:t>끝 시각에서 시작 시각을</a:t>
             </a:r>
           </a:p>
           <a:p>
@@ -22514,7 +22982,7 @@
                 <a:ea typeface="맑은 고딕"/>
                 <a:cs typeface="맑은 고딕"/>
               </a:rPr>
-              <a:t>단계에 걸린 시간이다.</a:t>
+              <a:t>뺀 값이다.</a:t>
             </a:r>
           </a:p>
         </p:txBody>
@@ -22618,7 +23086,7 @@
                 <a:ea typeface="맑은 고딕"/>
                 <a:cs typeface="맑은 고딕"/>
               </a:rPr>
-              <a:t>병목은 흐름 전체를 늦추는 단계이며, 승인된 세 처리 건에서는 에이전트의 판단 단계가 가장 오래 걸렸다.</a:t>
+              <a:t>가장 오래 걸린 단계가 병목이며, 승인 단계는 승인자가 응답할 때까지 열려 있어 병목이 되기 쉽다.</a:t>
             </a:r>
           </a:p>
         </p:txBody>
@@ -22693,7 +23161,7 @@
       </p:sp>
       <p:pic>
         <p:nvPicPr>
-          <p:cNvPr id="6" name="삽화:병목.svg" descr="illust_1960897287954115383_1791743711.png"/>
+          <p:cNvPr id="6" name="삽화:병목.svg" descr="illust_2361314329759271713_1791772944.png"/>
           <p:cNvPicPr>
             <a:picLocks noChangeAspect="1"/>
           </p:cNvPicPr>
@@ -22723,8 +23191,8 @@
         </p:nvSpPr>
         <p:spPr>
           <a:xfrm>
-            <a:off x="761104" y="2644033"/>
-            <a:ext cx="1418234" cy="507618"/>
+            <a:off x="804742" y="2662943"/>
+            <a:ext cx="1309139" cy="337185"/>
           </a:xfrm>
           <a:prstGeom prst="rect">
             <a:avLst/>
@@ -22755,6 +23223,27 @@
               <a:t>긴급 대응</a:t>
             </a:r>
           </a:p>
+        </p:txBody>
+      </p:sp>
+      <p:sp>
+        <p:nvSpPr>
+          <p:cNvPr id="8" name="TextBox 7"/>
+          <p:cNvSpPr txBox="1"/>
+          <p:nvPr/>
+        </p:nvSpPr>
+        <p:spPr>
+          <a:xfrm>
+            <a:off x="804742" y="3934626"/>
+            <a:ext cx="1309139" cy="337185"/>
+          </a:xfrm>
+          <a:prstGeom prst="rect">
+            <a:avLst/>
+          </a:prstGeom>
+          <a:noFill/>
+        </p:spPr>
+        <p:txBody>
+          <a:bodyPr wrap="square" anchor="t"/>
+          <a:lstStyle/>
           <a:p>
             <a:pPr algn="ctr">
               <a:lnSpc>
@@ -22765,29 +23254,29 @@
               </a:spcAft>
             </a:pPr>
             <a:r>
-              <a:rPr sz="1100" b="0">
-                <a:solidFill>
-                  <a:srgbClr val="556175"/>
-                </a:solidFill>
-                <a:latin typeface="맑은 고딕"/>
-                <a:ea typeface="맑은 고딕"/>
-                <a:cs typeface="맑은 고딕"/>
-              </a:rPr>
-              <a:t>146초</a:t>
-            </a:r>
-          </a:p>
-        </p:txBody>
-      </p:sp>
-      <p:sp>
-        <p:nvSpPr>
-          <p:cNvPr id="8" name="TextBox 7"/>
-          <p:cNvSpPr txBox="1"/>
-          <p:nvPr/>
-        </p:nvSpPr>
-        <p:spPr>
-          <a:xfrm>
-            <a:off x="761104" y="3825895"/>
-            <a:ext cx="1418234" cy="507618"/>
+              <a:rPr sz="1350" b="1">
+                <a:solidFill>
+                  <a:srgbClr val="13294B"/>
+                </a:solidFill>
+                <a:latin typeface="맑은 고딕"/>
+                <a:ea typeface="맑은 고딕"/>
+                <a:cs typeface="맑은 고딕"/>
+              </a:rPr>
+              <a:t>정기 점검</a:t>
+            </a:r>
+          </a:p>
+        </p:txBody>
+      </p:sp>
+      <p:sp>
+        <p:nvSpPr>
+          <p:cNvPr id="9" name="TextBox 8"/>
+          <p:cNvSpPr txBox="1"/>
+          <p:nvPr/>
+        </p:nvSpPr>
+        <p:spPr>
+          <a:xfrm>
+            <a:off x="804742" y="5206310"/>
+            <a:ext cx="1309139" cy="337185"/>
           </a:xfrm>
           <a:prstGeom prst="rect">
             <a:avLst/>
@@ -22815,9 +23304,30 @@
                 <a:ea typeface="맑은 고딕"/>
                 <a:cs typeface="맑은 고딕"/>
               </a:rPr>
-              <a:t>정기 점검</a:t>
-            </a:r>
-          </a:p>
+              <a:t>재고 보충</a:t>
+            </a:r>
+          </a:p>
+        </p:txBody>
+      </p:sp>
+      <p:sp>
+        <p:nvSpPr>
+          <p:cNvPr id="10" name="TextBox 9"/>
+          <p:cNvSpPr txBox="1"/>
+          <p:nvPr/>
+        </p:nvSpPr>
+        <p:spPr>
+          <a:xfrm>
+            <a:off x="2839363" y="2554211"/>
+            <a:ext cx="1145496" cy="546353"/>
+          </a:xfrm>
+          <a:prstGeom prst="rect">
+            <a:avLst/>
+          </a:prstGeom>
+          <a:noFill/>
+        </p:spPr>
+        <p:txBody>
+          <a:bodyPr wrap="square" anchor="t"/>
+          <a:lstStyle/>
           <a:p>
             <a:pPr algn="ctr">
               <a:lnSpc>
@@ -22828,29 +23338,29 @@
               </a:spcAft>
             </a:pPr>
             <a:r>
-              <a:rPr sz="1100" b="0">
-                <a:solidFill>
-                  <a:srgbClr val="556175"/>
-                </a:solidFill>
-                <a:latin typeface="맑은 고딕"/>
-                <a:ea typeface="맑은 고딕"/>
-                <a:cs typeface="맑은 고딕"/>
-              </a:rPr>
-              <a:t>60초</a:t>
-            </a:r>
-          </a:p>
-        </p:txBody>
-      </p:sp>
-      <p:sp>
-        <p:nvSpPr>
-          <p:cNvPr id="9" name="TextBox 8"/>
-          <p:cNvSpPr txBox="1"/>
-          <p:nvPr/>
-        </p:nvSpPr>
-        <p:spPr>
-          <a:xfrm>
-            <a:off x="761104" y="5007757"/>
-            <a:ext cx="1418234" cy="507618"/>
+              <a:rPr sz="1350" b="1">
+                <a:solidFill>
+                  <a:srgbClr val="13294B"/>
+                </a:solidFill>
+                <a:latin typeface="맑은 고딕"/>
+                <a:ea typeface="맑은 고딕"/>
+                <a:cs typeface="맑은 고딕"/>
+              </a:rPr>
+              <a:t>원인 진단 · 조치 제안</a:t>
+            </a:r>
+          </a:p>
+        </p:txBody>
+      </p:sp>
+      <p:sp>
+        <p:nvSpPr>
+          <p:cNvPr id="11" name="TextBox 10"/>
+          <p:cNvSpPr txBox="1"/>
+          <p:nvPr/>
+        </p:nvSpPr>
+        <p:spPr>
+          <a:xfrm>
+            <a:off x="2839363" y="3816440"/>
+            <a:ext cx="1145496" cy="546353"/>
           </a:xfrm>
           <a:prstGeom prst="rect">
             <a:avLst/>
@@ -22878,9 +23388,30 @@
                 <a:ea typeface="맑은 고딕"/>
                 <a:cs typeface="맑은 고딕"/>
               </a:rPr>
-              <a:t>재고 보충</a:t>
-            </a:r>
-          </a:p>
+              <a:t>정비 계획 제안</a:t>
+            </a:r>
+          </a:p>
+        </p:txBody>
+      </p:sp>
+      <p:sp>
+        <p:nvSpPr>
+          <p:cNvPr id="12" name="TextBox 11"/>
+          <p:cNvSpPr txBox="1"/>
+          <p:nvPr/>
+        </p:nvSpPr>
+        <p:spPr>
+          <a:xfrm>
+            <a:off x="2839363" y="5206310"/>
+            <a:ext cx="1145496" cy="337185"/>
+          </a:xfrm>
+          <a:prstGeom prst="rect">
+            <a:avLst/>
+          </a:prstGeom>
+          <a:noFill/>
+        </p:spPr>
+        <p:txBody>
+          <a:bodyPr wrap="square" anchor="t"/>
+          <a:lstStyle/>
           <a:p>
             <a:pPr algn="ctr">
               <a:lnSpc>
@@ -22891,29 +23422,29 @@
               </a:spcAft>
             </a:pPr>
             <a:r>
-              <a:rPr sz="1100" b="0">
-                <a:solidFill>
-                  <a:srgbClr val="556175"/>
-                </a:solidFill>
-                <a:latin typeface="맑은 고딕"/>
-                <a:ea typeface="맑은 고딕"/>
-                <a:cs typeface="맑은 고딕"/>
-              </a:rPr>
-              <a:t>58초</a:t>
-            </a:r>
-          </a:p>
-        </p:txBody>
-      </p:sp>
-      <p:sp>
-        <p:nvSpPr>
-          <p:cNvPr id="10" name="TextBox 9"/>
-          <p:cNvSpPr txBox="1"/>
-          <p:nvPr/>
-        </p:nvSpPr>
-        <p:spPr>
-          <a:xfrm>
-            <a:off x="3695758" y="2771674"/>
-            <a:ext cx="2400088" cy="337185"/>
+              <a:rPr sz="1350" b="1">
+                <a:solidFill>
+                  <a:srgbClr val="13294B"/>
+                </a:solidFill>
+                <a:latin typeface="맑은 고딕"/>
+                <a:ea typeface="맑은 고딕"/>
+                <a:cs typeface="맑은 고딕"/>
+              </a:rPr>
+              <a:t>발주안 제안</a:t>
+            </a:r>
+          </a:p>
+        </p:txBody>
+      </p:sp>
+      <p:sp>
+        <p:nvSpPr>
+          <p:cNvPr id="13" name="TextBox 12"/>
+          <p:cNvSpPr txBox="1"/>
+          <p:nvPr/>
+        </p:nvSpPr>
+        <p:spPr>
+          <a:xfrm>
+            <a:off x="4699432" y="2662943"/>
+            <a:ext cx="1527329" cy="337185"/>
           </a:xfrm>
           <a:prstGeom prst="rect">
             <a:avLst/>
@@ -22935,27 +23466,27 @@
             <a:r>
               <a:rPr sz="1350" b="1">
                 <a:solidFill>
-                  <a:srgbClr val="1A6FC4"/>
-                </a:solidFill>
-                <a:latin typeface="맑은 고딕"/>
-                <a:ea typeface="맑은 고딕"/>
-                <a:cs typeface="맑은 고딕"/>
-              </a:rPr>
-              <a:t>에이전트 82.3초</a:t>
-            </a:r>
-          </a:p>
-        </p:txBody>
-      </p:sp>
-      <p:sp>
-        <p:nvSpPr>
-          <p:cNvPr id="11" name="TextBox 10"/>
-          <p:cNvSpPr txBox="1"/>
-          <p:nvPr/>
-        </p:nvSpPr>
-        <p:spPr>
-          <a:xfrm>
-            <a:off x="7852276" y="2771674"/>
-            <a:ext cx="1963709" cy="337185"/>
+                  <a:srgbClr val="13294B"/>
+                </a:solidFill>
+                <a:latin typeface="맑은 고딕"/>
+                <a:ea typeface="맑은 고딕"/>
+                <a:cs typeface="맑은 고딕"/>
+              </a:rPr>
+              <a:t>운전원 승인</a:t>
+            </a:r>
+          </a:p>
+        </p:txBody>
+      </p:sp>
+      <p:sp>
+        <p:nvSpPr>
+          <p:cNvPr id="14" name="TextBox 13"/>
+          <p:cNvSpPr txBox="1"/>
+          <p:nvPr/>
+        </p:nvSpPr>
+        <p:spPr>
+          <a:xfrm>
+            <a:off x="4699432" y="3816440"/>
+            <a:ext cx="1527329" cy="546353"/>
           </a:xfrm>
           <a:prstGeom prst="rect">
             <a:avLst/>
@@ -22983,21 +23514,21 @@
                 <a:ea typeface="맑은 고딕"/>
                 <a:cs typeface="맑은 고딕"/>
               </a:rPr>
-              <a:t>재관측 60.2초</a:t>
-            </a:r>
-          </a:p>
-        </p:txBody>
-      </p:sp>
-      <p:sp>
-        <p:nvSpPr>
-          <p:cNvPr id="12" name="TextBox 11"/>
-          <p:cNvSpPr txBox="1"/>
-          <p:nvPr/>
-        </p:nvSpPr>
-        <p:spPr>
-          <a:xfrm>
-            <a:off x="3041189" y="3953536"/>
-            <a:ext cx="2181899" cy="337185"/>
+              <a:t>설비보전팀장 승인</a:t>
+            </a:r>
+          </a:p>
+        </p:txBody>
+      </p:sp>
+      <p:sp>
+        <p:nvSpPr>
+          <p:cNvPr id="15" name="TextBox 14"/>
+          <p:cNvSpPr txBox="1"/>
+          <p:nvPr/>
+        </p:nvSpPr>
+        <p:spPr>
+          <a:xfrm>
+            <a:off x="4699432" y="5206310"/>
+            <a:ext cx="1527329" cy="337185"/>
           </a:xfrm>
           <a:prstGeom prst="rect">
             <a:avLst/>
@@ -23025,21 +23556,21 @@
                 <a:ea typeface="맑은 고딕"/>
                 <a:cs typeface="맑은 고딕"/>
               </a:rPr>
-              <a:t>에이전트 55.3초</a:t>
-            </a:r>
-          </a:p>
-        </p:txBody>
-      </p:sp>
-      <p:sp>
-        <p:nvSpPr>
-          <p:cNvPr id="13" name="TextBox 12"/>
-          <p:cNvSpPr txBox="1"/>
-          <p:nvPr/>
-        </p:nvSpPr>
-        <p:spPr>
-          <a:xfrm>
-            <a:off x="2997551" y="5135398"/>
-            <a:ext cx="2181899" cy="337185"/>
+              <a:t>구매 담당 승인</a:t>
+            </a:r>
+          </a:p>
+        </p:txBody>
+      </p:sp>
+      <p:sp>
+        <p:nvSpPr>
+          <p:cNvPr id="16" name="TextBox 15"/>
+          <p:cNvSpPr txBox="1"/>
+          <p:nvPr/>
+        </p:nvSpPr>
+        <p:spPr>
+          <a:xfrm>
+            <a:off x="6750417" y="3206599"/>
+            <a:ext cx="4800177" cy="337185"/>
           </a:xfrm>
           <a:prstGeom prst="rect">
             <a:avLst/>
@@ -23067,21 +23598,21 @@
                 <a:ea typeface="맑은 고딕"/>
                 <a:cs typeface="맑은 고딕"/>
               </a:rPr>
-              <a:t>에이전트 54.4초</a:t>
-            </a:r>
-          </a:p>
-        </p:txBody>
-      </p:sp>
-      <p:sp>
-        <p:nvSpPr>
-          <p:cNvPr id="14" name="TextBox 13"/>
-          <p:cNvSpPr txBox="1"/>
-          <p:nvPr/>
-        </p:nvSpPr>
-        <p:spPr>
-          <a:xfrm>
-            <a:off x="5910386" y="2053102"/>
-            <a:ext cx="2400088" cy="337185"/>
+              <a:t>냉각 명령 → 재관측 → 작업지시 등록 → 결과 보고</a:t>
+            </a:r>
+          </a:p>
+        </p:txBody>
+      </p:sp>
+      <p:sp>
+        <p:nvSpPr>
+          <p:cNvPr id="17" name="TextBox 16"/>
+          <p:cNvSpPr txBox="1"/>
+          <p:nvPr/>
+        </p:nvSpPr>
+        <p:spPr>
+          <a:xfrm>
+            <a:off x="7132249" y="4478283"/>
+            <a:ext cx="2836468" cy="337185"/>
           </a:xfrm>
           <a:prstGeom prst="rect">
             <a:avLst/>
@@ -23109,21 +23640,21 @@
                 <a:ea typeface="맑은 고딕"/>
                 <a:cs typeface="맑은 고딕"/>
               </a:rPr>
-              <a:t>승인 1.3초 · 명령 1.1초</a:t>
-            </a:r>
-          </a:p>
-        </p:txBody>
-      </p:sp>
-      <p:sp>
-        <p:nvSpPr>
-          <p:cNvPr id="15" name="TextBox 14"/>
-          <p:cNvSpPr txBox="1"/>
-          <p:nvPr/>
-        </p:nvSpPr>
-        <p:spPr>
-          <a:xfrm>
-            <a:off x="6041300" y="3953536"/>
-            <a:ext cx="4145608" cy="546353"/>
+              <a:t>정비 오더와 공지 → 결과 보고</a:t>
+            </a:r>
+          </a:p>
+        </p:txBody>
+      </p:sp>
+      <p:sp>
+        <p:nvSpPr>
+          <p:cNvPr id="18" name="TextBox 17"/>
+          <p:cNvSpPr txBox="1"/>
+          <p:nvPr/>
+        </p:nvSpPr>
+        <p:spPr>
+          <a:xfrm>
+            <a:off x="6750417" y="5749966"/>
+            <a:ext cx="4800177" cy="337185"/>
           </a:xfrm>
           <a:prstGeom prst="rect">
             <a:avLst/>
@@ -23151,21 +23682,21 @@
                 <a:ea typeface="맑은 고딕"/>
                 <a:cs typeface="맑은 고딕"/>
               </a:rPr>
-              <a:t>승인 3.7초 · 정비 오더와 공지 1.0초 · 보고 0.4초</a:t>
-            </a:r>
-          </a:p>
-        </p:txBody>
-      </p:sp>
-      <p:sp>
-        <p:nvSpPr>
-          <p:cNvPr id="16" name="TextBox 15"/>
-          <p:cNvSpPr txBox="1"/>
-          <p:nvPr/>
-        </p:nvSpPr>
-        <p:spPr>
-          <a:xfrm>
-            <a:off x="5932205" y="5135398"/>
-            <a:ext cx="4363798" cy="546353"/>
+              <a:t>ERP 발주와 통지 → 입고와 재고 반영 → 결과 보고</a:t>
+            </a:r>
+          </a:p>
+        </p:txBody>
+      </p:sp>
+      <p:sp>
+        <p:nvSpPr>
+          <p:cNvPr id="19" name="TextBox 18"/>
+          <p:cNvSpPr txBox="1"/>
+          <p:nvPr/>
+        </p:nvSpPr>
+        <p:spPr>
+          <a:xfrm>
+            <a:off x="3968496" y="1651269"/>
+            <a:ext cx="3272848" cy="507618"/>
           </a:xfrm>
           <a:prstGeom prst="rect">
             <a:avLst/>
@@ -23193,30 +23724,9 @@
                 <a:ea typeface="맑은 고딕"/>
                 <a:cs typeface="맑은 고딕"/>
               </a:rPr>
-              <a:t>승인 1.7초 · 발주 0.3초 · 입고 0.9초 · 보고 0.4초</a:t>
-            </a:r>
-          </a:p>
-        </p:txBody>
-      </p:sp>
-      <p:sp>
-        <p:nvSpPr>
-          <p:cNvPr id="17" name="TextBox 16"/>
-          <p:cNvSpPr txBox="1"/>
-          <p:nvPr/>
-        </p:nvSpPr>
-        <p:spPr>
-          <a:xfrm>
-            <a:off x="2146610" y="5929609"/>
-            <a:ext cx="436379" cy="337185"/>
-          </a:xfrm>
-          <a:prstGeom prst="rect">
-            <a:avLst/>
-          </a:prstGeom>
-          <a:noFill/>
-        </p:spPr>
-        <p:txBody>
-          <a:bodyPr wrap="square" anchor="t"/>
-          <a:lstStyle/>
+              <a:t>승인 단계</a:t>
+            </a:r>
+          </a:p>
           <a:p>
             <a:pPr algn="ctr">
               <a:lnSpc>
@@ -23227,29 +23737,29 @@
               </a:spcAft>
             </a:pPr>
             <a:r>
-              <a:rPr sz="1350" b="1">
-                <a:solidFill>
-                  <a:srgbClr val="13294B"/>
-                </a:solidFill>
-                <a:latin typeface="맑은 고딕"/>
-                <a:ea typeface="맑은 고딕"/>
-                <a:cs typeface="맑은 고딕"/>
-              </a:rPr>
-              <a:t>0</a:t>
-            </a:r>
-          </a:p>
-        </p:txBody>
-      </p:sp>
-      <p:sp>
-        <p:nvSpPr>
-          <p:cNvPr id="18" name="TextBox 17"/>
-          <p:cNvSpPr txBox="1"/>
-          <p:nvPr/>
-        </p:nvSpPr>
-        <p:spPr>
-          <a:xfrm>
-            <a:off x="5419458" y="5929609"/>
-            <a:ext cx="654569" cy="337185"/>
+              <a:rPr sz="1100" b="0">
+                <a:solidFill>
+                  <a:srgbClr val="556175"/>
+                </a:solidFill>
+                <a:latin typeface="맑은 고딕"/>
+                <a:ea typeface="맑은 고딕"/>
+                <a:cs typeface="맑은 고딕"/>
+              </a:rPr>
+              <a:t>승인자가 응답할 때까지 열려 있다</a:t>
+            </a:r>
+          </a:p>
+        </p:txBody>
+      </p:sp>
+      <p:sp>
+        <p:nvSpPr>
+          <p:cNvPr id="20" name="TextBox 19"/>
+          <p:cNvSpPr txBox="1"/>
+          <p:nvPr/>
+        </p:nvSpPr>
+        <p:spPr>
+          <a:xfrm>
+            <a:off x="9477791" y="3778620"/>
+            <a:ext cx="1963709" cy="678053"/>
           </a:xfrm>
           <a:prstGeom prst="rect">
             <a:avLst/>
@@ -23271,36 +23781,15 @@
             <a:r>
               <a:rPr sz="1350" b="1">
                 <a:solidFill>
-                  <a:srgbClr val="13294B"/>
-                </a:solidFill>
-                <a:latin typeface="맑은 고딕"/>
-                <a:ea typeface="맑은 고딕"/>
-                <a:cs typeface="맑은 고딕"/>
-              </a:rPr>
-              <a:t>60초</a:t>
-            </a:r>
-          </a:p>
-        </p:txBody>
-      </p:sp>
-      <p:sp>
-        <p:nvSpPr>
-          <p:cNvPr id="19" name="TextBox 18"/>
-          <p:cNvSpPr txBox="1"/>
-          <p:nvPr/>
-        </p:nvSpPr>
-        <p:spPr>
-          <a:xfrm>
-            <a:off x="8801402" y="5929609"/>
-            <a:ext cx="654569" cy="546353"/>
-          </a:xfrm>
-          <a:prstGeom prst="rect">
-            <a:avLst/>
-          </a:prstGeom>
-          <a:noFill/>
-        </p:spPr>
-        <p:txBody>
-          <a:bodyPr wrap="square" anchor="t"/>
-          <a:lstStyle/>
+                  <a:srgbClr val="1A6FC4"/>
+                </a:solidFill>
+                <a:latin typeface="맑은 고딕"/>
+                <a:ea typeface="맑은 고딕"/>
+                <a:cs typeface="맑은 고딕"/>
+              </a:rPr>
+              <a:t>병목</a:t>
+            </a:r>
+          </a:p>
           <a:p>
             <a:pPr algn="ctr">
               <a:lnSpc>
@@ -23311,38 +23800,17 @@
               </a:spcAft>
             </a:pPr>
             <a:r>
-              <a:rPr sz="1350" b="1">
-                <a:solidFill>
-                  <a:srgbClr val="13294B"/>
-                </a:solidFill>
-                <a:latin typeface="맑은 고딕"/>
-                <a:ea typeface="맑은 고딕"/>
-                <a:cs typeface="맑은 고딕"/>
-              </a:rPr>
-              <a:t>120초</a:t>
-            </a:r>
-          </a:p>
-        </p:txBody>
-      </p:sp>
-      <p:sp>
-        <p:nvSpPr>
-          <p:cNvPr id="20" name="TextBox 19"/>
-          <p:cNvSpPr txBox="1"/>
-          <p:nvPr/>
-        </p:nvSpPr>
-        <p:spPr>
-          <a:xfrm>
-            <a:off x="6095847" y="3305876"/>
-            <a:ext cx="4800177" cy="507618"/>
-          </a:xfrm>
-          <a:prstGeom prst="rect">
-            <a:avLst/>
-          </a:prstGeom>
-          <a:noFill/>
-        </p:spPr>
-        <p:txBody>
-          <a:bodyPr wrap="square" anchor="t"/>
-          <a:lstStyle/>
+              <a:rPr sz="1100" b="0">
+                <a:solidFill>
+                  <a:srgbClr val="556175"/>
+                </a:solidFill>
+                <a:latin typeface="맑은 고딕"/>
+                <a:ea typeface="맑은 고딕"/>
+                <a:cs typeface="맑은 고딕"/>
+              </a:rPr>
+              <a:t>Bottleneck ·</a:t>
+            </a:r>
+          </a:p>
           <a:p>
             <a:pPr algn="ctr">
               <a:lnSpc>
@@ -23353,27 +23821,6 @@
               </a:spcAft>
             </a:pPr>
             <a:r>
-              <a:rPr sz="1350" b="1">
-                <a:solidFill>
-                  <a:srgbClr val="1A6FC4"/>
-                </a:solidFill>
-                <a:latin typeface="맑은 고딕"/>
-                <a:ea typeface="맑은 고딕"/>
-                <a:cs typeface="맑은 고딕"/>
-              </a:rPr>
-              <a:t>병목</a:t>
-            </a:r>
-          </a:p>
-          <a:p>
-            <a:pPr algn="ctr">
-              <a:lnSpc>
-                <a:spcPct val="110000"/>
-              </a:lnSpc>
-              <a:spcAft>
-                <a:spcPts val="100"/>
-              </a:spcAft>
-            </a:pPr>
-            <a:r>
               <a:rPr sz="1100" b="0">
                 <a:solidFill>
                   <a:srgbClr val="556175"/>
@@ -23382,7 +23829,7 @@
                 <a:ea typeface="맑은 고딕"/>
                 <a:cs typeface="맑은 고딕"/>
               </a:rPr>
-              <a:t>Bottleneck · 가장 긴 단계가 전체 시간을 좌우한다</a:t>
+              <a:t>가장 오래 걸린 단계</a:t>
             </a:r>
           </a:p>
         </p:txBody>
@@ -23680,7 +24127,7 @@
                 <a:ea typeface="맑은 고딕"/>
                 <a:cs typeface="맑은 고딕"/>
               </a:rPr>
-              <a:t>승인된 세 처리 건은 146초, 60초, 58초였다.</a:t>
+              <a:t>처리 건의 시작 시각과 끝 시각에서 구한다.</a:t>
             </a:r>
           </a:p>
         </p:txBody>
@@ -32244,7 +32691,7 @@
       </p:sp>
       <p:pic>
         <p:nvPicPr>
-          <p:cNvPr id="6" name="삽화:요소_복습.svg" descr="illust_2371019097539946657_1791743711.png"/>
+          <p:cNvPr id="6" name="삽화:요소_복습.svg" descr="illust_4674596445412910967_1791772944.png"/>
           <p:cNvPicPr>
             <a:picLocks noChangeAspect="1"/>
           </p:cNvPicPr>
@@ -33070,7 +33517,7 @@
       </p:sp>
       <p:pic>
         <p:nvPicPr>
-          <p:cNvPr id="6" name="삽화:다섯자리.svg" descr="illust_5660034357335848775_1791743711.png"/>
+          <p:cNvPr id="6" name="삽화:다섯자리.svg" descr="illust_2851220588218952993_1791772944.png"/>
           <p:cNvPicPr>
             <a:picLocks noChangeAspect="1"/>
           </p:cNvPicPr>
@@ -33964,7 +34411,7 @@
       </p:sp>
       <p:pic>
         <p:nvPicPr>
-          <p:cNvPr id="6" name="삽화:주고받는것.svg" descr="illust_3671160616409607982_1791743711.png"/>
+          <p:cNvPr id="6" name="삽화:주고받는것.svg" descr="illust_8664800811131972051_1791772944.png"/>
           <p:cNvPicPr>
             <a:picLocks noChangeAspect="1"/>
           </p:cNvPicPr>
@@ -39670,7 +40117,7 @@
       </p:sp>
       <p:pic>
         <p:nvPicPr>
-          <p:cNvPr id="6" name="삽화:세종료.svg" descr="illust_7885912017708574039_1791743711.png"/>
+          <p:cNvPr id="6" name="삽화:세종료.svg" descr="illust_2717912434270869313_1791772944.png"/>
           <p:cNvPicPr>
             <a:picLocks noChangeAspect="1"/>
           </p:cNvPicPr>
@@ -41010,7 +41457,7 @@
       </p:sp>
       <p:pic>
         <p:nvPicPr>
-          <p:cNvPr id="6" name="삽화:세층연결.svg" descr="illust_4726296643851634745_1791743711.png"/>
+          <p:cNvPr id="6" name="삽화:세층연결.svg" descr="illust_2758762999406648446_1791772944.png"/>
           <p:cNvPicPr>
             <a:picLocks noChangeAspect="1"/>
           </p:cNvPicPr>
@@ -42339,7 +42786,7 @@
       </p:sp>
       <p:pic>
         <p:nvPicPr>
-          <p:cNvPr id="6" name="삽화:세시작.svg" descr="illust_3765132440710975657_1791743711.png"/>
+          <p:cNvPr id="6" name="삽화:세시작.svg" descr="illust_1881972051394295677_1791772944.png"/>
           <p:cNvPicPr>
             <a:picLocks noChangeAspect="1"/>
           </p:cNvPicPr>
@@ -49708,7 +50155,7 @@
                 <a:ea typeface="맑은 고딕"/>
                 <a:cs typeface="맑은 고딕"/>
               </a:rPr>
-              <a:t>에이전트 단계, 재관측</a:t>
+              <a:t>응답을 기다리는 승인 단계</a:t>
             </a:r>
           </a:p>
         </p:txBody>
@@ -49856,7 +50303,7 @@
                 <a:ea typeface="맑은 고딕"/>
                 <a:cs typeface="맑은 고딕"/>
               </a:rPr>
-              <a:t>146초, 60초, 58초</a:t>
+              <a:t>처리 건의 시작에서 끝까지</a:t>
             </a:r>
           </a:p>
         </p:txBody>
@@ -50176,7 +50623,7 @@
                 <a:ea typeface="맑은 고딕"/>
                 <a:cs typeface="맑은 고딕"/>
               </a:rPr>
-              <a:t>배운 내용을 바탕으로 정답을 맞춰보세요.</a:t>
+              <a:t>배운 내용을 바탕으로 정답을 맞혀 보세요.</a:t>
             </a:r>
           </a:p>
         </p:txBody>
@@ -56006,7 +56453,7 @@
       </p:sp>
       <p:pic>
         <p:nvPicPr>
-          <p:cNvPr id="6" name="삽화:운전시간.svg" descr="illust_5537350604974124467_1791743711.png"/>
+          <p:cNvPr id="6" name="삽화:운전시간.svg" descr="illust_8254875664507589160_1791772944.png"/>
           <p:cNvPicPr>
             <a:picLocks noChangeAspect="1"/>
           </p:cNvPicPr>

--- a/docs/교재/통합반/10일차/통합반_10일차.pptx
+++ b/docs/교재/통합반/10일차/통합반_10일차.pptx
@@ -842,7 +842,7 @@
           <a:lstStyle/>
           <a:p>
             <a:r>
-              <a:t>승인 블록을 다시 써서 그린 정기 점검 프로세스입니다. 하늘색 요소는 긴급 대응 프로세스의 승인 블록과 같고, 승인 역할만 설비보전팀장으로 바뀌었습니다. 새로 그린 것은 흰 요소 넷입니다. 정기 점검 요청이라는 시작 이벤트, 에이전트의 정비 계획 제안, 그리고 승인 뒤의 정비 오더 등록 · 공지 메일과 결과 보고입니다. 작업은 여섯, 게이트웨이는 하나, 끝 이벤트는 셋입니다.</a:t>
+              <a:t>정기 점검 프로세스의 전체 그림입니다. 하늘색 요소는 긴급 대응 프로세스의 승인 블록과 같고, 승인 역할만 설비보전팀장으로 바뀌었습니다. 이 프로세스에서 달라진 것은 흰 요소 넷입니다. 정기 점검 요청이라는 시작 이벤트, 에이전트의 정비 계획 제안, 그리고 승인 뒤의 정비 오더 등록 · 공지 메일과 결과 보고입니다. 작업은 여섯, 게이트웨이는 하나, 끝 이벤트는 셋입니다.</a:t>
             </a:r>
           </a:p>
         </p:txBody>
@@ -912,7 +912,7 @@
           <a:lstStyle/>
           <a:p>
             <a:r>
-              <a:t>재고 보충 프로세스도 같은 방법으로 그립니다. 하늘색 승인 블록은 그대로이고 승인 역할이 구매 담당입니다. 승인 뒤에는 ERP 발주 · 공급사 메일, 입고 · 재고 반영, 결과 보고의 세 작업이 이어집니다. 정기 점검보다 시스템 작업이 하나 많아 작업은 일곱입니다. 두 그림을 견주면 승인 블록의 오른쪽에 무엇을 잇느냐만 다릅니다.</a:t>
+              <a:t>재고 보충 프로세스도 같은 구조입니다. 하늘색 승인 블록은 그대로이고 승인 역할이 구매 담당입니다. 승인 뒤에는 ERP 발주 · 공급사 메일, 입고 · 재고 반영, 결과 보고의 세 작업이 이어집니다. 정기 점검보다 시스템 작업이 하나 많아 작업은 일곱입니다. 두 그림을 견주면 승인 블록의 오른쪽에 이어지는 작업만 다릅니다.</a:t>
             </a:r>
           </a:p>
         </p:txBody>
@@ -7764,7 +7764,7 @@
       </p:sp>
       <p:pic>
         <p:nvPicPr>
-          <p:cNvPr id="6" name="삽화:재고.svg" descr="illust_6491785954511839089_1791772944.png"/>
+          <p:cNvPr id="6" name="삽화:재고.svg" descr="illust_1458431188312668347_1791772944.png"/>
           <p:cNvPicPr>
             <a:picLocks noChangeAspect="1"/>
           </p:cNvPicPr>
@@ -10572,7 +10572,7 @@
       </p:sp>
       <p:pic>
         <p:nvPicPr>
-          <p:cNvPr id="6" name="삽화:세흐름_나란히.svg" descr="illust_6481463111208013829_1791772944.png"/>
+          <p:cNvPr id="6" name="삽화:세흐름_나란히.svg" descr="illust_164561422580388326_1791772944.png"/>
           <p:cNvPicPr>
             <a:picLocks noChangeAspect="1"/>
           </p:cNvPicPr>
@@ -12058,7 +12058,7 @@
       </p:sp>
       <p:pic>
         <p:nvPicPr>
-          <p:cNvPr id="6" name="삽화:승인블록_자리.svg" descr="illust_8993793145455126790_1791772944.png"/>
+          <p:cNvPr id="6" name="삽화:승인블록_자리.svg" descr="illust_4286830674164960031_1791772944.png"/>
           <p:cNvPicPr>
             <a:picLocks noChangeAspect="1"/>
           </p:cNvPicPr>
@@ -12914,7 +12914,7 @@
                 <a:ea typeface="맑은 고딕"/>
                 <a:cs typeface="맑은 고딕"/>
               </a:rPr>
-              <a:t>정기 점검 프로세스는 승인 블록을 그대로 쓰고, 시작 이벤트와 제안 작업과 승인 뒤의 작업 둘만 새로 그린 것이다.</a:t>
+              <a:t>정기 점검 프로세스는 승인 블록이 긴급 대응과 같고, 시작 이벤트와 제안 작업과 승인 뒤의 작업 둘만 다르다.</a:t>
             </a:r>
           </a:p>
         </p:txBody>
@@ -12989,7 +12989,7 @@
       </p:sp>
       <p:pic>
         <p:nvPicPr>
-          <p:cNvPr id="6" name="삽화:흐름_정기점검.svg" descr="illust_7802059031914229748_1791772944.png"/>
+          <p:cNvPr id="6" name="삽화:흐름_정기점검.svg" descr="illust_6963454173407212036_1791772944.png"/>
           <p:cNvPicPr>
             <a:picLocks noChangeAspect="1"/>
           </p:cNvPicPr>
@@ -13678,7 +13678,7 @@
                 <a:ea typeface="맑은 고딕"/>
                 <a:cs typeface="맑은 고딕"/>
               </a:rPr>
-              <a:t>새로 그린 것</a:t>
+              <a:t>이 프로세스에서 달라진 요소</a:t>
             </a:r>
           </a:p>
           <a:p>
@@ -13803,7 +13803,7 @@
                 <a:ea typeface="맑은 고딕"/>
                 <a:cs typeface="맑은 고딕"/>
               </a:rPr>
-              <a:t>재고 보충 프로세스도 같은 승인 블록 뒤에 발주, 입고와 재고 반영, 결과 보고의 세 작업을 이어 작업 일곱으로 완성된다.</a:t>
+              <a:t>재고 보충 프로세스도 승인 블록은 같고, 그 뒤에 발주, 입고와 재고 반영, 결과 보고의 세 작업이 이어져 작업이 일곱이다.</a:t>
             </a:r>
           </a:p>
         </p:txBody>
@@ -13878,7 +13878,7 @@
       </p:sp>
       <p:pic>
         <p:nvPicPr>
-          <p:cNvPr id="6" name="삽화:흐름_재고보충.svg" descr="illust_6434205169900711284_1791772944.png"/>
+          <p:cNvPr id="6" name="삽화:흐름_재고보충.svg" descr="illust_2735040916206287950_1791772944.png"/>
           <p:cNvPicPr>
             <a:picLocks noChangeAspect="1"/>
           </p:cNvPicPr>
@@ -23161,7 +23161,7 @@
       </p:sp>
       <p:pic>
         <p:nvPicPr>
-          <p:cNvPr id="6" name="삽화:병목.svg" descr="illust_2361314329759271713_1791772944.png"/>
+          <p:cNvPr id="6" name="삽화:병목.svg" descr="illust_1188132283001415410_1791772944.png"/>
           <p:cNvPicPr>
             <a:picLocks noChangeAspect="1"/>
           </p:cNvPicPr>
@@ -32691,7 +32691,7 @@
       </p:sp>
       <p:pic>
         <p:nvPicPr>
-          <p:cNvPr id="6" name="삽화:요소_복습.svg" descr="illust_4674596445412910967_1791772944.png"/>
+          <p:cNvPr id="6" name="삽화:요소_복습.svg" descr="illust_3791493167697890928_1791772944.png"/>
           <p:cNvPicPr>
             <a:picLocks noChangeAspect="1"/>
           </p:cNvPicPr>
@@ -33517,7 +33517,7 @@
       </p:sp>
       <p:pic>
         <p:nvPicPr>
-          <p:cNvPr id="6" name="삽화:다섯자리.svg" descr="illust_2851220588218952993_1791772944.png"/>
+          <p:cNvPr id="6" name="삽화:다섯자리.svg" descr="illust_5356438334119662256_1791772944.png"/>
           <p:cNvPicPr>
             <a:picLocks noChangeAspect="1"/>
           </p:cNvPicPr>
@@ -34411,7 +34411,7 @@
       </p:sp>
       <p:pic>
         <p:nvPicPr>
-          <p:cNvPr id="6" name="삽화:주고받는것.svg" descr="illust_8664800811131972051_1791772944.png"/>
+          <p:cNvPr id="6" name="삽화:주고받는것.svg" descr="illust_7849151694516119900_1791772944.png"/>
           <p:cNvPicPr>
             <a:picLocks noChangeAspect="1"/>
           </p:cNvPicPr>
@@ -40117,7 +40117,7 @@
       </p:sp>
       <p:pic>
         <p:nvPicPr>
-          <p:cNvPr id="6" name="삽화:세종료.svg" descr="illust_2717912434270869313_1791772944.png"/>
+          <p:cNvPr id="6" name="삽화:세종료.svg" descr="illust_2440462780679536375_1791772944.png"/>
           <p:cNvPicPr>
             <a:picLocks noChangeAspect="1"/>
           </p:cNvPicPr>
@@ -41457,7 +41457,7 @@
       </p:sp>
       <p:pic>
         <p:nvPicPr>
-          <p:cNvPr id="6" name="삽화:세층연결.svg" descr="illust_2758762999406648446_1791772944.png"/>
+          <p:cNvPr id="6" name="삽화:세층연결.svg" descr="illust_623457295153009842_1791772944.png"/>
           <p:cNvPicPr>
             <a:picLocks noChangeAspect="1"/>
           </p:cNvPicPr>
@@ -42786,7 +42786,7 @@
       </p:sp>
       <p:pic>
         <p:nvPicPr>
-          <p:cNvPr id="6" name="삽화:세시작.svg" descr="illust_1881972051394295677_1791772944.png"/>
+          <p:cNvPr id="6" name="삽화:세시작.svg" descr="illust_3472256601739937174_1791772944.png"/>
           <p:cNvPicPr>
             <a:picLocks noChangeAspect="1"/>
           </p:cNvPicPr>
@@ -56453,7 +56453,7 @@
       </p:sp>
       <p:pic>
         <p:nvPicPr>
-          <p:cNvPr id="6" name="삽화:운전시간.svg" descr="illust_8254875664507589160_1791772944.png"/>
+          <p:cNvPr id="6" name="삽화:운전시간.svg" descr="illust_5618966759057018918_1791772944.png"/>
           <p:cNvPicPr>
             <a:picLocks noChangeAspect="1"/>
           </p:cNvPicPr>
